--- a/oko/template rapportage oko.pptx
+++ b/oko/template rapportage oko.pptx
@@ -6,10 +6,10 @@
     <p:sldMasterId id="2147483648" r:id="rId5"/>
   </p:sldMasterIdLst>
   <p:notesMasterIdLst>
-    <p:notesMasterId r:id="rId25"/>
+    <p:notesMasterId r:id="rId24"/>
   </p:notesMasterIdLst>
   <p:handoutMasterIdLst>
-    <p:handoutMasterId r:id="rId26"/>
+    <p:handoutMasterId r:id="rId25"/>
   </p:handoutMasterIdLst>
   <p:sldIdLst>
     <p:sldId id="286" r:id="rId6"/>
@@ -22,15 +22,14 @@
     <p:sldId id="289" r:id="rId13"/>
     <p:sldId id="292" r:id="rId14"/>
     <p:sldId id="293" r:id="rId15"/>
-    <p:sldId id="301" r:id="rId16"/>
-    <p:sldId id="294" r:id="rId17"/>
-    <p:sldId id="295" r:id="rId18"/>
-    <p:sldId id="296" r:id="rId19"/>
-    <p:sldId id="297" r:id="rId20"/>
-    <p:sldId id="298" r:id="rId21"/>
-    <p:sldId id="299" r:id="rId22"/>
-    <p:sldId id="300" r:id="rId23"/>
-    <p:sldId id="302" r:id="rId24"/>
+    <p:sldId id="294" r:id="rId16"/>
+    <p:sldId id="295" r:id="rId17"/>
+    <p:sldId id="296" r:id="rId18"/>
+    <p:sldId id="297" r:id="rId19"/>
+    <p:sldId id="298" r:id="rId20"/>
+    <p:sldId id="299" r:id="rId21"/>
+    <p:sldId id="300" r:id="rId22"/>
+    <p:sldId id="302" r:id="rId23"/>
   </p:sldIdLst>
   <p:sldSz cx="12192000" cy="6858000"/>
   <p:notesSz cx="6858000" cy="9144000"/>
@@ -163,44 +162,21 @@
 </p188:authorLst>
 </file>
 
-<file path=ppt/revisionInfo.xml><?xml version="1.0" encoding="utf-8"?>
-<p1510:revInfo xmlns:a="http://schemas.openxmlformats.org/drawingml/2006/main" xmlns:r="http://schemas.openxmlformats.org/officeDocument/2006/relationships" xmlns:p1510="http://schemas.microsoft.com/office/powerpoint/2015/10/main">
-  <p1510:revLst>
-    <p1510:client id="{5EDEB3EF-581C-481D-8DB1-4BA11FF66E10}" v="9" dt="2026-01-15T13:54:05.234"/>
-  </p1510:revLst>
-</p1510:revInfo>
-</file>
-
 <file path=ppt/changesInfos/changesInfo1.xml><?xml version="1.0" encoding="utf-8"?>
 <pc:chgInfo xmlns:a="http://schemas.openxmlformats.org/drawingml/2006/main" xmlns:r="http://schemas.openxmlformats.org/officeDocument/2006/relationships" xmlns:ac="http://schemas.microsoft.com/office/drawing/2013/main/command" xmlns:pc="http://schemas.microsoft.com/office/powerpoint/2013/main/command">
   <pc:docChgLst>
     <pc:chgData name="Vermeulen - van Gent, Sander" userId="e08259fd-81d2-4a86-9b20-28ba02d67a18" providerId="ADAL" clId="{CD1B3BBE-56CC-4974-BC5E-9FCD75B07556}"/>
     <pc:docChg chg="undo custSel addSld delSld modSld modMainMaster">
-      <pc:chgData name="Vermeulen - van Gent, Sander" userId="e08259fd-81d2-4a86-9b20-28ba02d67a18" providerId="ADAL" clId="{CD1B3BBE-56CC-4974-BC5E-9FCD75B07556}" dt="2026-01-28T21:42:54.224" v="2894" actId="14100"/>
+      <pc:chgData name="Vermeulen - van Gent, Sander" userId="e08259fd-81d2-4a86-9b20-28ba02d67a18" providerId="ADAL" clId="{CD1B3BBE-56CC-4974-BC5E-9FCD75B07556}" dt="2026-02-23T11:29:09.034" v="2895" actId="47"/>
       <pc:docMkLst>
         <pc:docMk/>
       </pc:docMkLst>
-      <pc:sldChg chg="addSp delSp modSp new mod modClrScheme chgLayout">
-        <pc:chgData name="Vermeulen - van Gent, Sander" userId="e08259fd-81d2-4a86-9b20-28ba02d67a18" providerId="ADAL" clId="{CD1B3BBE-56CC-4974-BC5E-9FCD75B07556}" dt="2026-01-15T13:43:01.192" v="2796" actId="478"/>
+      <pc:sldChg chg="addSp delSp modSp new del mod modClrScheme chgLayout">
+        <pc:chgData name="Vermeulen - van Gent, Sander" userId="e08259fd-81d2-4a86-9b20-28ba02d67a18" providerId="ADAL" clId="{CD1B3BBE-56CC-4974-BC5E-9FCD75B07556}" dt="2026-02-23T11:29:09.034" v="2895" actId="47"/>
         <pc:sldMkLst>
           <pc:docMk/>
           <pc:sldMk cId="1709752066" sldId="301"/>
         </pc:sldMkLst>
-      </pc:sldChg>
-      <pc:sldChg chg="addSp delSp modSp new mod modClrScheme chgLayout">
-        <pc:chgData name="Vermeulen - van Gent, Sander" userId="e08259fd-81d2-4a86-9b20-28ba02d67a18" providerId="ADAL" clId="{CD1B3BBE-56CC-4974-BC5E-9FCD75B07556}" dt="2026-01-15T13:48:39.363" v="2887" actId="1076"/>
-        <pc:sldMkLst>
-          <pc:docMk/>
-          <pc:sldMk cId="1573809413" sldId="302"/>
-        </pc:sldMkLst>
-        <pc:spChg chg="add mod ord">
-          <ac:chgData name="Vermeulen - van Gent, Sander" userId="e08259fd-81d2-4a86-9b20-28ba02d67a18" providerId="ADAL" clId="{CD1B3BBE-56CC-4974-BC5E-9FCD75B07556}" dt="2026-01-15T13:48:39.363" v="2887" actId="1076"/>
-          <ac:spMkLst>
-            <pc:docMk/>
-            <pc:sldMk cId="1573809413" sldId="302"/>
-            <ac:spMk id="6" creationId="{417D7511-0ADB-1912-1524-CB1730A640E6}"/>
-          </ac:spMkLst>
-        </pc:spChg>
       </pc:sldChg>
       <pc:sldMasterChg chg="addSldLayout modSldLayout">
         <pc:chgData name="Vermeulen - van Gent, Sander" userId="e08259fd-81d2-4a86-9b20-28ba02d67a18" providerId="ADAL" clId="{CD1B3BBE-56CC-4974-BC5E-9FCD75B07556}" dt="2026-01-28T21:42:54.224" v="2894" actId="14100"/>
@@ -208,23 +184,6 @@
           <pc:docMk/>
           <pc:sldMasterMk cId="582609979" sldId="2147483648"/>
         </pc:sldMasterMkLst>
-        <pc:sldLayoutChg chg="modSp">
-          <pc:chgData name="Vermeulen - van Gent, Sander" userId="e08259fd-81d2-4a86-9b20-28ba02d67a18" providerId="ADAL" clId="{CD1B3BBE-56CC-4974-BC5E-9FCD75B07556}" dt="2026-01-15T13:50:53.022" v="2888" actId="16037"/>
-          <pc:sldLayoutMkLst>
-            <pc:docMk/>
-            <pc:sldMasterMk cId="582609979" sldId="2147483648"/>
-            <pc:sldLayoutMk cId="2036413586" sldId="2147483653"/>
-          </pc:sldLayoutMkLst>
-          <pc:spChg chg="mod">
-            <ac:chgData name="Vermeulen - van Gent, Sander" userId="e08259fd-81d2-4a86-9b20-28ba02d67a18" providerId="ADAL" clId="{CD1B3BBE-56CC-4974-BC5E-9FCD75B07556}" dt="2026-01-15T13:50:53.022" v="2888" actId="16037"/>
-            <ac:spMkLst>
-              <pc:docMk/>
-              <pc:sldMasterMk cId="582609979" sldId="2147483648"/>
-              <pc:sldLayoutMk cId="2036413586" sldId="2147483653"/>
-              <ac:spMk id="11" creationId="{25BB0762-1AD0-F5A1-E01E-F53682EB8F5D}"/>
-            </ac:spMkLst>
-          </pc:spChg>
-        </pc:sldLayoutChg>
         <pc:sldLayoutChg chg="addSp modSp mod">
           <pc:chgData name="Vermeulen - van Gent, Sander" userId="e08259fd-81d2-4a86-9b20-28ba02d67a18" providerId="ADAL" clId="{CD1B3BBE-56CC-4974-BC5E-9FCD75B07556}" dt="2026-01-28T21:42:28.397" v="2892" actId="20577"/>
           <pc:sldLayoutMkLst>
@@ -233,73 +192,12 @@
             <pc:sldLayoutMk cId="1058498703" sldId="2147483665"/>
           </pc:sldLayoutMkLst>
           <pc:spChg chg="mod">
-            <ac:chgData name="Vermeulen - van Gent, Sander" userId="e08259fd-81d2-4a86-9b20-28ba02d67a18" providerId="ADAL" clId="{CD1B3BBE-56CC-4974-BC5E-9FCD75B07556}" dt="2026-01-07T18:05:38.979" v="2770" actId="14100"/>
-            <ac:spMkLst>
-              <pc:docMk/>
-              <pc:sldMasterMk cId="582609979" sldId="2147483648"/>
-              <pc:sldLayoutMk cId="1058498703" sldId="2147483665"/>
-              <ac:spMk id="8" creationId="{3A2A39C7-5342-D2BD-DCFF-D6D224422930}"/>
-            </ac:spMkLst>
-          </pc:spChg>
-          <pc:spChg chg="mod">
             <ac:chgData name="Vermeulen - van Gent, Sander" userId="e08259fd-81d2-4a86-9b20-28ba02d67a18" providerId="ADAL" clId="{CD1B3BBE-56CC-4974-BC5E-9FCD75B07556}" dt="2026-01-28T21:42:28.397" v="2892" actId="20577"/>
             <ac:spMkLst>
               <pc:docMk/>
               <pc:sldMasterMk cId="582609979" sldId="2147483648"/>
               <pc:sldLayoutMk cId="1058498703" sldId="2147483665"/>
               <ac:spMk id="16" creationId="{39DA7E63-F8DB-69F2-E53A-B92720D0DB73}"/>
-            </ac:spMkLst>
-          </pc:spChg>
-        </pc:sldLayoutChg>
-        <pc:sldLayoutChg chg="addSp modSp mod">
-          <pc:chgData name="Vermeulen - van Gent, Sander" userId="e08259fd-81d2-4a86-9b20-28ba02d67a18" providerId="ADAL" clId="{CD1B3BBE-56CC-4974-BC5E-9FCD75B07556}" dt="2026-01-15T13:36:45.740" v="2788" actId="14100"/>
-          <pc:sldLayoutMkLst>
-            <pc:docMk/>
-            <pc:sldMasterMk cId="582609979" sldId="2147483648"/>
-            <pc:sldLayoutMk cId="2055947998" sldId="2147483702"/>
-          </pc:sldLayoutMkLst>
-          <pc:spChg chg="mod">
-            <ac:chgData name="Vermeulen - van Gent, Sander" userId="e08259fd-81d2-4a86-9b20-28ba02d67a18" providerId="ADAL" clId="{CD1B3BBE-56CC-4974-BC5E-9FCD75B07556}" dt="2026-01-15T13:36:44.537" v="2787" actId="14100"/>
-            <ac:spMkLst>
-              <pc:docMk/>
-              <pc:sldMasterMk cId="582609979" sldId="2147483648"/>
-              <pc:sldLayoutMk cId="2055947998" sldId="2147483702"/>
-              <ac:spMk id="2" creationId="{5B025D78-5D1C-4DB1-10FC-67D4F0244B2C}"/>
-            </ac:spMkLst>
-          </pc:spChg>
-          <pc:spChg chg="mod">
-            <ac:chgData name="Vermeulen - van Gent, Sander" userId="e08259fd-81d2-4a86-9b20-28ba02d67a18" providerId="ADAL" clId="{CD1B3BBE-56CC-4974-BC5E-9FCD75B07556}" dt="2026-01-15T13:36:43.352" v="2785" actId="1076"/>
-            <ac:spMkLst>
-              <pc:docMk/>
-              <pc:sldMasterMk cId="582609979" sldId="2147483648"/>
-              <pc:sldLayoutMk cId="2055947998" sldId="2147483702"/>
-              <ac:spMk id="4" creationId="{3E07DD97-A27C-5F5F-D1D5-3FB81C6DC42D}"/>
-            </ac:spMkLst>
-          </pc:spChg>
-          <pc:spChg chg="mod">
-            <ac:chgData name="Vermeulen - van Gent, Sander" userId="e08259fd-81d2-4a86-9b20-28ba02d67a18" providerId="ADAL" clId="{CD1B3BBE-56CC-4974-BC5E-9FCD75B07556}" dt="2026-01-15T13:36:45.740" v="2788" actId="14100"/>
-            <ac:spMkLst>
-              <pc:docMk/>
-              <pc:sldMasterMk cId="582609979" sldId="2147483648"/>
-              <pc:sldLayoutMk cId="2055947998" sldId="2147483702"/>
-              <ac:spMk id="5" creationId="{7C6D467A-5799-9402-B402-F4834EAC4D6A}"/>
-            </ac:spMkLst>
-          </pc:spChg>
-        </pc:sldLayoutChg>
-        <pc:sldLayoutChg chg="addSp modSp mod">
-          <pc:chgData name="Vermeulen - van Gent, Sander" userId="e08259fd-81d2-4a86-9b20-28ba02d67a18" providerId="ADAL" clId="{CD1B3BBE-56CC-4974-BC5E-9FCD75B07556}" dt="2026-01-15T13:37:22.426" v="2792" actId="962"/>
-          <pc:sldLayoutMkLst>
-            <pc:docMk/>
-            <pc:sldMasterMk cId="582609979" sldId="2147483648"/>
-            <pc:sldLayoutMk cId="909363416" sldId="2147483703"/>
-          </pc:sldLayoutMkLst>
-          <pc:spChg chg="add mod">
-            <ac:chgData name="Vermeulen - van Gent, Sander" userId="e08259fd-81d2-4a86-9b20-28ba02d67a18" providerId="ADAL" clId="{CD1B3BBE-56CC-4974-BC5E-9FCD75B07556}" dt="2026-01-15T13:37:22.426" v="2792" actId="962"/>
-            <ac:spMkLst>
-              <pc:docMk/>
-              <pc:sldMasterMk cId="582609979" sldId="2147483648"/>
-              <pc:sldLayoutMk cId="909363416" sldId="2147483703"/>
-              <ac:spMk id="8" creationId="{6C3CADC8-EEAB-828D-62BC-6CA67D8282C1}"/>
             </ac:spMkLst>
           </pc:spChg>
         </pc:sldLayoutChg>
@@ -317,82 +215,6 @@
               <pc:sldMasterMk cId="582609979" sldId="2147483648"/>
               <pc:sldLayoutMk cId="4151803614" sldId="2147483705"/>
               <ac:spMk id="17" creationId="{83BD08AD-0583-B8D4-FD8D-EC44809BEB33}"/>
-            </ac:spMkLst>
-          </pc:spChg>
-        </pc:sldLayoutChg>
-        <pc:sldLayoutChg chg="add mod modTransition">
-          <pc:chgData name="Vermeulen - van Gent, Sander" userId="e08259fd-81d2-4a86-9b20-28ba02d67a18" providerId="ADAL" clId="{CD1B3BBE-56CC-4974-BC5E-9FCD75B07556}" dt="2026-01-15T13:41:54.491" v="2793" actId="2890"/>
-          <pc:sldLayoutMkLst>
-            <pc:docMk/>
-            <pc:sldMasterMk cId="582609979" sldId="2147483648"/>
-            <pc:sldLayoutMk cId="2634502353" sldId="2147483706"/>
-          </pc:sldLayoutMkLst>
-        </pc:sldLayoutChg>
-        <pc:sldLayoutChg chg="addSp delSp modSp add mod modTransition">
-          <pc:chgData name="Vermeulen - van Gent, Sander" userId="e08259fd-81d2-4a86-9b20-28ba02d67a18" providerId="ADAL" clId="{CD1B3BBE-56CC-4974-BC5E-9FCD75B07556}" dt="2026-01-15T13:47:35.816" v="2881" actId="1076"/>
-          <pc:sldLayoutMkLst>
-            <pc:docMk/>
-            <pc:sldMasterMk cId="582609979" sldId="2147483648"/>
-            <pc:sldLayoutMk cId="3562401432" sldId="2147483707"/>
-          </pc:sldLayoutMkLst>
-          <pc:spChg chg="mod">
-            <ac:chgData name="Vermeulen - van Gent, Sander" userId="e08259fd-81d2-4a86-9b20-28ba02d67a18" providerId="ADAL" clId="{CD1B3BBE-56CC-4974-BC5E-9FCD75B07556}" dt="2026-01-15T13:47:30.904" v="2880" actId="403"/>
-            <ac:spMkLst>
-              <pc:docMk/>
-              <pc:sldMasterMk cId="582609979" sldId="2147483648"/>
-              <pc:sldLayoutMk cId="3562401432" sldId="2147483707"/>
-              <ac:spMk id="2" creationId="{D58FCCE2-B6C0-B248-DA9E-969396D57D8F}"/>
-            </ac:spMkLst>
-          </pc:spChg>
-          <pc:spChg chg="add mod">
-            <ac:chgData name="Vermeulen - van Gent, Sander" userId="e08259fd-81d2-4a86-9b20-28ba02d67a18" providerId="ADAL" clId="{CD1B3BBE-56CC-4974-BC5E-9FCD75B07556}" dt="2026-01-15T13:47:35.816" v="2881" actId="1076"/>
-            <ac:spMkLst>
-              <pc:docMk/>
-              <pc:sldMasterMk cId="582609979" sldId="2147483648"/>
-              <pc:sldLayoutMk cId="3562401432" sldId="2147483707"/>
-              <ac:spMk id="10" creationId="{1E889B4B-6313-A93F-D20F-5F9B72B75503}"/>
-            </ac:spMkLst>
-          </pc:spChg>
-          <pc:spChg chg="mod">
-            <ac:chgData name="Vermeulen - van Gent, Sander" userId="e08259fd-81d2-4a86-9b20-28ba02d67a18" providerId="ADAL" clId="{CD1B3BBE-56CC-4974-BC5E-9FCD75B07556}" dt="2026-01-15T13:46:46.809" v="2818" actId="207"/>
-            <ac:spMkLst>
-              <pc:docMk/>
-              <pc:sldMasterMk cId="582609979" sldId="2147483648"/>
-              <pc:sldLayoutMk cId="3562401432" sldId="2147483707"/>
-              <ac:spMk id="21" creationId="{21B134B6-8770-5116-9C38-3B3F380F4B00}"/>
-            </ac:spMkLst>
-          </pc:spChg>
-          <pc:spChg chg="mod">
-            <ac:chgData name="Vermeulen - van Gent, Sander" userId="e08259fd-81d2-4a86-9b20-28ba02d67a18" providerId="ADAL" clId="{CD1B3BBE-56CC-4974-BC5E-9FCD75B07556}" dt="2026-01-15T13:46:46.809" v="2818" actId="207"/>
-            <ac:spMkLst>
-              <pc:docMk/>
-              <pc:sldMasterMk cId="582609979" sldId="2147483648"/>
-              <pc:sldLayoutMk cId="3562401432" sldId="2147483707"/>
-              <ac:spMk id="22" creationId="{4A4E7343-055A-E338-0CFE-074BB9B9608F}"/>
-            </ac:spMkLst>
-          </pc:spChg>
-        </pc:sldLayoutChg>
-      </pc:sldMasterChg>
-      <pc:sldMasterChg chg="modSldLayout">
-        <pc:chgData name="Vermeulen - van Gent, Sander" userId="e08259fd-81d2-4a86-9b20-28ba02d67a18" providerId="ADAL" clId="{CD1B3BBE-56CC-4974-BC5E-9FCD75B07556}" dt="2026-01-15T13:54:05.231" v="2889" actId="16037"/>
-        <pc:sldMasterMkLst>
-          <pc:docMk/>
-          <pc:sldMasterMk cId="447926890" sldId="2147483699"/>
-        </pc:sldMasterMkLst>
-        <pc:sldLayoutChg chg="modSp">
-          <pc:chgData name="Vermeulen - van Gent, Sander" userId="e08259fd-81d2-4a86-9b20-28ba02d67a18" providerId="ADAL" clId="{CD1B3BBE-56CC-4974-BC5E-9FCD75B07556}" dt="2026-01-15T13:54:05.231" v="2889" actId="16037"/>
-          <pc:sldLayoutMkLst>
-            <pc:docMk/>
-            <pc:sldMasterMk cId="447926890" sldId="2147483699"/>
-            <pc:sldLayoutMk cId="4263179123" sldId="2147483716"/>
-          </pc:sldLayoutMkLst>
-          <pc:spChg chg="mod">
-            <ac:chgData name="Vermeulen - van Gent, Sander" userId="e08259fd-81d2-4a86-9b20-28ba02d67a18" providerId="ADAL" clId="{CD1B3BBE-56CC-4974-BC5E-9FCD75B07556}" dt="2026-01-15T13:54:05.231" v="2889" actId="16037"/>
-            <ac:spMkLst>
-              <pc:docMk/>
-              <pc:sldMasterMk cId="447926890" sldId="2147483699"/>
-              <pc:sldLayoutMk cId="4263179123" sldId="2147483716"/>
-              <ac:spMk id="4" creationId="{B61AB89E-9409-6D40-D0EB-0CDEC38AFAAC}"/>
             </ac:spMkLst>
           </pc:spChg>
         </pc:sldLayoutChg>
@@ -496,7 +318,7 @@
           <a:p>
             <a:fld id="{BBEDBBAB-6028-4680-9556-A8238B314949}" type="datetimeFigureOut">
               <a:rPr lang="nl-NL" smtClean="0"/>
-              <a:t>28-1-2026</a:t>
+              <a:t>23-2-2026</a:t>
             </a:fld>
             <a:endParaRPr lang="nl-NL"/>
           </a:p>
@@ -672,7 +494,7 @@
           </a:lstStyle>
           <a:p>
             <a:fld id="{37F81271-B6F7-4A7E-8F6C-1E1DF4AA2733}" type="datetimeFigureOut">
-              <a:t>28-1-2026</a:t>
+              <a:t>23-2-2026</a:t>
             </a:fld>
             <a:endParaRPr lang="nl-NL"/>
           </a:p>
@@ -2282,848 +2104,6 @@
 
 <file path=ppt/slideLayouts/slideLayout11.xml><?xml version="1.0" encoding="utf-8"?>
 <p:sldLayout xmlns:a="http://schemas.openxmlformats.org/drawingml/2006/main" xmlns:r="http://schemas.openxmlformats.org/officeDocument/2006/relationships" xmlns:p="http://schemas.openxmlformats.org/presentationml/2006/main" preserve="1" userDrawn="1">
-  <p:cSld name="Gezin2">
-    <p:spTree>
-      <p:nvGrpSpPr>
-        <p:cNvPr id="1" name=""/>
-        <p:cNvGrpSpPr/>
-        <p:nvPr/>
-      </p:nvGrpSpPr>
-      <p:grpSpPr>
-        <a:xfrm>
-          <a:off x="0" y="0"/>
-          <a:ext cx="0" cy="0"/>
-          <a:chOff x="0" y="0"/>
-          <a:chExt cx="0" cy="0"/>
-        </a:xfrm>
-      </p:grpSpPr>
-      <p:sp>
-        <p:nvSpPr>
-          <p:cNvPr id="38" name="Rechthoek 37" hidden="1">
-            <a:extLst>
-              <a:ext uri="{FF2B5EF4-FFF2-40B4-BE49-F238E27FC236}">
-                <a16:creationId xmlns:a16="http://schemas.microsoft.com/office/drawing/2014/main" id="{71B6D817-B6BD-5D3B-C482-2942CE54FB52}"/>
-              </a:ext>
-            </a:extLst>
-          </p:cNvPr>
-          <p:cNvSpPr/>
-          <p:nvPr userDrawn="1"/>
-        </p:nvSpPr>
-        <p:spPr>
-          <a:xfrm>
-            <a:off x="457221" y="1520170"/>
-            <a:ext cx="3454375" cy="4880630"/>
-          </a:xfrm>
-          <a:prstGeom prst="rect">
-            <a:avLst/>
-          </a:prstGeom>
-          <a:solidFill>
-            <a:schemeClr val="bg1">
-              <a:lumMod val="95000"/>
-            </a:schemeClr>
-          </a:solidFill>
-          <a:ln>
-            <a:noFill/>
-          </a:ln>
-        </p:spPr>
-        <p:style>
-          <a:lnRef idx="2">
-            <a:schemeClr val="accent1">
-              <a:shade val="15000"/>
-            </a:schemeClr>
-          </a:lnRef>
-          <a:fillRef idx="1">
-            <a:schemeClr val="accent1"/>
-          </a:fillRef>
-          <a:effectRef idx="0">
-            <a:schemeClr val="accent1"/>
-          </a:effectRef>
-          <a:fontRef idx="minor">
-            <a:schemeClr val="lt1"/>
-          </a:fontRef>
-        </p:style>
-        <p:txBody>
-          <a:bodyPr rtlCol="0" anchor="ctr"/>
-          <a:lstStyle/>
-          <a:p>
-            <a:pPr algn="ctr"/>
-            <a:endParaRPr lang="nl-NL" sz="1240"/>
-          </a:p>
-        </p:txBody>
-      </p:sp>
-      <p:sp>
-        <p:nvSpPr>
-          <p:cNvPr id="40" name="Rechthoek 39" hidden="1">
-            <a:extLst>
-              <a:ext uri="{FF2B5EF4-FFF2-40B4-BE49-F238E27FC236}">
-                <a16:creationId xmlns:a16="http://schemas.microsoft.com/office/drawing/2014/main" id="{DA25F52B-68C7-5049-CD59-306C46906407}"/>
-              </a:ext>
-            </a:extLst>
-          </p:cNvPr>
-          <p:cNvSpPr/>
-          <p:nvPr userDrawn="1"/>
-        </p:nvSpPr>
-        <p:spPr>
-          <a:xfrm>
-            <a:off x="4368814" y="1520170"/>
-            <a:ext cx="3454375" cy="4880630"/>
-          </a:xfrm>
-          <a:prstGeom prst="rect">
-            <a:avLst/>
-          </a:prstGeom>
-          <a:solidFill>
-            <a:schemeClr val="bg1">
-              <a:lumMod val="95000"/>
-            </a:schemeClr>
-          </a:solidFill>
-          <a:ln>
-            <a:noFill/>
-          </a:ln>
-        </p:spPr>
-        <p:style>
-          <a:lnRef idx="2">
-            <a:schemeClr val="accent1">
-              <a:shade val="15000"/>
-            </a:schemeClr>
-          </a:lnRef>
-          <a:fillRef idx="1">
-            <a:schemeClr val="accent1"/>
-          </a:fillRef>
-          <a:effectRef idx="0">
-            <a:schemeClr val="accent1"/>
-          </a:effectRef>
-          <a:fontRef idx="minor">
-            <a:schemeClr val="lt1"/>
-          </a:fontRef>
-        </p:style>
-        <p:txBody>
-          <a:bodyPr rtlCol="0" anchor="ctr"/>
-          <a:lstStyle/>
-          <a:p>
-            <a:pPr algn="ctr"/>
-            <a:endParaRPr lang="nl-NL" sz="1240"/>
-          </a:p>
-        </p:txBody>
-      </p:sp>
-      <p:sp>
-        <p:nvSpPr>
-          <p:cNvPr id="41" name="Rechthoek 40" hidden="1">
-            <a:extLst>
-              <a:ext uri="{FF2B5EF4-FFF2-40B4-BE49-F238E27FC236}">
-                <a16:creationId xmlns:a16="http://schemas.microsoft.com/office/drawing/2014/main" id="{810F9007-0225-12FD-9C82-0980B9351E10}"/>
-              </a:ext>
-            </a:extLst>
-          </p:cNvPr>
-          <p:cNvSpPr/>
-          <p:nvPr userDrawn="1"/>
-        </p:nvSpPr>
-        <p:spPr>
-          <a:xfrm>
-            <a:off x="8280409" y="1520170"/>
-            <a:ext cx="3454375" cy="4880630"/>
-          </a:xfrm>
-          <a:prstGeom prst="rect">
-            <a:avLst/>
-          </a:prstGeom>
-          <a:solidFill>
-            <a:schemeClr val="bg1">
-              <a:lumMod val="95000"/>
-            </a:schemeClr>
-          </a:solidFill>
-          <a:ln>
-            <a:noFill/>
-          </a:ln>
-        </p:spPr>
-        <p:style>
-          <a:lnRef idx="2">
-            <a:schemeClr val="accent1">
-              <a:shade val="15000"/>
-            </a:schemeClr>
-          </a:lnRef>
-          <a:fillRef idx="1">
-            <a:schemeClr val="accent1"/>
-          </a:fillRef>
-          <a:effectRef idx="0">
-            <a:schemeClr val="accent1"/>
-          </a:effectRef>
-          <a:fontRef idx="minor">
-            <a:schemeClr val="lt1"/>
-          </a:fontRef>
-        </p:style>
-        <p:txBody>
-          <a:bodyPr rtlCol="0" anchor="ctr"/>
-          <a:lstStyle/>
-          <a:p>
-            <a:pPr algn="ctr"/>
-            <a:endParaRPr lang="nl-NL" sz="1240"/>
-          </a:p>
-        </p:txBody>
-      </p:sp>
-      <p:cxnSp>
-        <p:nvCxnSpPr>
-          <p:cNvPr id="20" name="Rechte verbindingslijn 19">
-            <a:extLst>
-              <a:ext uri="{FF2B5EF4-FFF2-40B4-BE49-F238E27FC236}">
-                <a16:creationId xmlns:a16="http://schemas.microsoft.com/office/drawing/2014/main" id="{3225D304-6E5E-946E-2D93-5C9A280E58BF}"/>
-              </a:ext>
-            </a:extLst>
-          </p:cNvPr>
-          <p:cNvCxnSpPr>
-            <a:cxnSpLocks/>
-          </p:cNvCxnSpPr>
-          <p:nvPr userDrawn="1"/>
-        </p:nvCxnSpPr>
-        <p:spPr>
-          <a:xfrm flipV="1">
-            <a:off x="4140175" y="1519200"/>
-            <a:ext cx="0" cy="4881600"/>
-          </a:xfrm>
-          <a:prstGeom prst="line">
-            <a:avLst/>
-          </a:prstGeom>
-          <a:ln w="12700">
-            <a:solidFill>
-              <a:schemeClr val="tx2">
-                <a:lumMod val="20000"/>
-                <a:lumOff val="80000"/>
-              </a:schemeClr>
-            </a:solidFill>
-          </a:ln>
-        </p:spPr>
-        <p:style>
-          <a:lnRef idx="1">
-            <a:schemeClr val="accent1"/>
-          </a:lnRef>
-          <a:fillRef idx="0">
-            <a:schemeClr val="accent1"/>
-          </a:fillRef>
-          <a:effectRef idx="0">
-            <a:schemeClr val="accent1"/>
-          </a:effectRef>
-          <a:fontRef idx="minor">
-            <a:schemeClr val="tx1"/>
-          </a:fontRef>
-        </p:style>
-      </p:cxnSp>
-      <p:cxnSp>
-        <p:nvCxnSpPr>
-          <p:cNvPr id="21" name="Rechte verbindingslijn 20">
-            <a:extLst>
-              <a:ext uri="{FF2B5EF4-FFF2-40B4-BE49-F238E27FC236}">
-                <a16:creationId xmlns:a16="http://schemas.microsoft.com/office/drawing/2014/main" id="{ED64F893-BBB7-B392-C184-DF060C3E7F93}"/>
-              </a:ext>
-            </a:extLst>
-          </p:cNvPr>
-          <p:cNvCxnSpPr>
-            <a:cxnSpLocks/>
-          </p:cNvCxnSpPr>
-          <p:nvPr userDrawn="1"/>
-        </p:nvCxnSpPr>
-        <p:spPr>
-          <a:xfrm flipV="1">
-            <a:off x="8051825" y="1519200"/>
-            <a:ext cx="0" cy="4881600"/>
-          </a:xfrm>
-          <a:prstGeom prst="line">
-            <a:avLst/>
-          </a:prstGeom>
-          <a:ln w="12700">
-            <a:solidFill>
-              <a:schemeClr val="tx2">
-                <a:lumMod val="20000"/>
-                <a:lumOff val="80000"/>
-              </a:schemeClr>
-            </a:solidFill>
-          </a:ln>
-        </p:spPr>
-        <p:style>
-          <a:lnRef idx="1">
-            <a:schemeClr val="accent1"/>
-          </a:lnRef>
-          <a:fillRef idx="0">
-            <a:schemeClr val="accent1"/>
-          </a:fillRef>
-          <a:effectRef idx="0">
-            <a:schemeClr val="accent1"/>
-          </a:effectRef>
-          <a:fontRef idx="minor">
-            <a:schemeClr val="tx1"/>
-          </a:fontRef>
-        </p:style>
-      </p:cxnSp>
-      <p:sp>
-        <p:nvSpPr>
-          <p:cNvPr id="18" name="Rectangle 16">
-            <a:extLst>
-              <a:ext uri="{FF2B5EF4-FFF2-40B4-BE49-F238E27FC236}">
-                <a16:creationId xmlns:a16="http://schemas.microsoft.com/office/drawing/2014/main" id="{50E25E35-8B3C-6C74-2AD7-DAFDA89C0A01}"/>
-              </a:ext>
-            </a:extLst>
-          </p:cNvPr>
-          <p:cNvSpPr>
-            <a:spLocks/>
-          </p:cNvSpPr>
-          <p:nvPr userDrawn="1"/>
-        </p:nvSpPr>
-        <p:spPr>
-          <a:xfrm rot="10800000" flipH="1">
-            <a:off x="9719595" y="0"/>
-            <a:ext cx="576000" cy="1066800"/>
-          </a:xfrm>
-          <a:prstGeom prst="rtTriangle">
-            <a:avLst/>
-          </a:prstGeom>
-          <a:solidFill>
-            <a:schemeClr val="accent5"/>
-          </a:solidFill>
-          <a:ln>
-            <a:noFill/>
-          </a:ln>
-        </p:spPr>
-        <p:style>
-          <a:lnRef idx="2">
-            <a:schemeClr val="accent1">
-              <a:shade val="50000"/>
-            </a:schemeClr>
-          </a:lnRef>
-          <a:fillRef idx="1">
-            <a:schemeClr val="accent1"/>
-          </a:fillRef>
-          <a:effectRef idx="0">
-            <a:schemeClr val="accent1"/>
-          </a:effectRef>
-          <a:fontRef idx="minor">
-            <a:schemeClr val="lt1"/>
-          </a:fontRef>
-        </p:style>
-        <p:txBody>
-          <a:bodyPr rtlCol="0" anchor="ctr"/>
-          <a:lstStyle/>
-          <a:p>
-            <a:pPr algn="l"/>
-            <a:endParaRPr lang="en-US" sz="1600" b="1">
-              <a:latin typeface="Century Gothic" panose="020B0502020202020204" pitchFamily="34" charset="0"/>
-            </a:endParaRPr>
-          </a:p>
-        </p:txBody>
-      </p:sp>
-      <p:sp>
-        <p:nvSpPr>
-          <p:cNvPr id="17" name="Rectangle 16">
-            <a:extLst>
-              <a:ext uri="{FF2B5EF4-FFF2-40B4-BE49-F238E27FC236}">
-                <a16:creationId xmlns:a16="http://schemas.microsoft.com/office/drawing/2014/main" id="{048B55B4-D6BF-8A04-5D90-9A498A5AC6B5}"/>
-              </a:ext>
-            </a:extLst>
-          </p:cNvPr>
-          <p:cNvSpPr/>
-          <p:nvPr userDrawn="1"/>
-        </p:nvSpPr>
-        <p:spPr>
-          <a:xfrm>
-            <a:off x="0" y="0"/>
-            <a:ext cx="9719589" cy="1066800"/>
-          </a:xfrm>
-          <a:prstGeom prst="rect">
-            <a:avLst/>
-          </a:prstGeom>
-          <a:solidFill>
-            <a:schemeClr val="accent5"/>
-          </a:solidFill>
-          <a:ln>
-            <a:noFill/>
-          </a:ln>
-        </p:spPr>
-        <p:style>
-          <a:lnRef idx="2">
-            <a:schemeClr val="accent1">
-              <a:shade val="50000"/>
-            </a:schemeClr>
-          </a:lnRef>
-          <a:fillRef idx="1">
-            <a:schemeClr val="accent1"/>
-          </a:fillRef>
-          <a:effectRef idx="0">
-            <a:schemeClr val="accent1"/>
-          </a:effectRef>
-          <a:fontRef idx="minor">
-            <a:schemeClr val="lt1"/>
-          </a:fontRef>
-        </p:style>
-        <p:txBody>
-          <a:bodyPr rtlCol="0" anchor="ctr"/>
-          <a:lstStyle/>
-          <a:p>
-            <a:pPr marL="0" indent="270272" algn="l"/>
-            <a:r>
-              <a:rPr lang="nl-NL" sz="2400" b="1" noProof="0" dirty="0">
-                <a:latin typeface="Century Gothic" panose="020B0502020202020204" pitchFamily="34" charset="0"/>
-              </a:rPr>
-              <a:t>Gezin</a:t>
-            </a:r>
-            <a:endParaRPr lang="nl-NL" sz="1800" b="1" noProof="0" dirty="0">
-              <a:latin typeface="Century Gothic" panose="020B0502020202020204" pitchFamily="34" charset="0"/>
-            </a:endParaRPr>
-          </a:p>
-        </p:txBody>
-      </p:sp>
-      <p:sp>
-        <p:nvSpPr>
-          <p:cNvPr id="4" name="Tekstvak 3">
-            <a:extLst>
-              <a:ext uri="{FF2B5EF4-FFF2-40B4-BE49-F238E27FC236}">
-                <a16:creationId xmlns:a16="http://schemas.microsoft.com/office/drawing/2014/main" id="{31DE1161-19FB-F452-68B5-16351A66F708}"/>
-              </a:ext>
-            </a:extLst>
-          </p:cNvPr>
-          <p:cNvSpPr txBox="1"/>
-          <p:nvPr userDrawn="1"/>
-        </p:nvSpPr>
-        <p:spPr>
-          <a:xfrm>
-            <a:off x="1780721" y="3247241"/>
-            <a:ext cx="1791102" cy="415498"/>
-          </a:xfrm>
-          <a:prstGeom prst="rect">
-            <a:avLst/>
-          </a:prstGeom>
-          <a:noFill/>
-        </p:spPr>
-        <p:txBody>
-          <a:bodyPr wrap="square">
-            <a:spAutoFit/>
-          </a:bodyPr>
-          <a:lstStyle/>
-          <a:p>
-            <a:pPr marL="0" algn="l" defTabSz="629889" rtl="0" eaLnBrk="1" latinLnBrk="0" hangingPunct="1"/>
-            <a:r>
-              <a:rPr lang="nl-NL" sz="1000" b="1" kern="1200" noProof="0" dirty="0">
-                <a:solidFill>
-                  <a:schemeClr val="tx1"/>
-                </a:solidFill>
-                <a:latin typeface="Century Gothic" panose="020B0502020202020204" pitchFamily="34" charset="0"/>
-                <a:ea typeface="+mn-ea"/>
-                <a:cs typeface="Arial" panose="020B0604020202020204" pitchFamily="34" charset="0"/>
-              </a:rPr>
-              <a:t>kan bij niemand terecht als hij/zij ergens mee zit</a:t>
-            </a:r>
-          </a:p>
-        </p:txBody>
-      </p:sp>
-      <p:sp>
-        <p:nvSpPr>
-          <p:cNvPr id="2" name="TextBox 1">
-            <a:extLst>
-              <a:ext uri="{FF2B5EF4-FFF2-40B4-BE49-F238E27FC236}">
-                <a16:creationId xmlns:a16="http://schemas.microsoft.com/office/drawing/2014/main" id="{6F19E014-4ACE-EB8C-D81A-6956EF3C72F5}"/>
-              </a:ext>
-            </a:extLst>
-          </p:cNvPr>
-          <p:cNvSpPr txBox="1"/>
-          <p:nvPr userDrawn="1"/>
-        </p:nvSpPr>
-        <p:spPr>
-          <a:xfrm>
-            <a:off x="463889" y="1524946"/>
-            <a:ext cx="3676286" cy="992579"/>
-          </a:xfrm>
-          <a:prstGeom prst="rect">
-            <a:avLst/>
-          </a:prstGeom>
-          <a:noFill/>
-        </p:spPr>
-        <p:txBody>
-          <a:bodyPr rot="0" spcFirstLastPara="0" vert="horz" wrap="square" lIns="68580" tIns="34290" rIns="68580" bIns="34290" numCol="1" spcCol="0" rtlCol="0" fromWordArt="0" anchor="t" anchorCtr="0" forceAA="0" compatLnSpc="1">
-            <a:prstTxWarp prst="textNoShape">
-              <a:avLst/>
-            </a:prstTxWarp>
-            <a:spAutoFit/>
-          </a:bodyPr>
-          <a:lstStyle>
-            <a:defPPr>
-              <a:defRPr lang="nl-NL"/>
-            </a:defPPr>
-            <a:lvl1pPr marL="0" algn="l" defTabSz="839852" rtl="0" eaLnBrk="1" latinLnBrk="0" hangingPunct="1">
-              <a:defRPr sz="1653" kern="1200">
-                <a:solidFill>
-                  <a:sysClr val="windowText" lastClr="000000"/>
-                </a:solidFill>
-                <a:latin typeface="Calibri"/>
-              </a:defRPr>
-            </a:lvl1pPr>
-            <a:lvl2pPr marL="419926" algn="l" defTabSz="839852" rtl="0" eaLnBrk="1" latinLnBrk="0" hangingPunct="1">
-              <a:defRPr sz="1653" kern="1200">
-                <a:solidFill>
-                  <a:sysClr val="windowText" lastClr="000000"/>
-                </a:solidFill>
-                <a:latin typeface="Calibri"/>
-              </a:defRPr>
-            </a:lvl2pPr>
-            <a:lvl3pPr marL="839852" algn="l" defTabSz="839852" rtl="0" eaLnBrk="1" latinLnBrk="0" hangingPunct="1">
-              <a:defRPr sz="1653" kern="1200">
-                <a:solidFill>
-                  <a:sysClr val="windowText" lastClr="000000"/>
-                </a:solidFill>
-                <a:latin typeface="Calibri"/>
-              </a:defRPr>
-            </a:lvl3pPr>
-            <a:lvl4pPr marL="1259779" algn="l" defTabSz="839852" rtl="0" eaLnBrk="1" latinLnBrk="0" hangingPunct="1">
-              <a:defRPr sz="1653" kern="1200">
-                <a:solidFill>
-                  <a:sysClr val="windowText" lastClr="000000"/>
-                </a:solidFill>
-                <a:latin typeface="Calibri"/>
-              </a:defRPr>
-            </a:lvl4pPr>
-            <a:lvl5pPr marL="1679704" algn="l" defTabSz="839852" rtl="0" eaLnBrk="1" latinLnBrk="0" hangingPunct="1">
-              <a:defRPr sz="1653" kern="1200">
-                <a:solidFill>
-                  <a:sysClr val="windowText" lastClr="000000"/>
-                </a:solidFill>
-                <a:latin typeface="Calibri"/>
-              </a:defRPr>
-            </a:lvl5pPr>
-            <a:lvl6pPr marL="2099630" algn="l" defTabSz="839852" rtl="0" eaLnBrk="1" latinLnBrk="0" hangingPunct="1">
-              <a:defRPr sz="1653" kern="1200">
-                <a:solidFill>
-                  <a:sysClr val="windowText" lastClr="000000"/>
-                </a:solidFill>
-                <a:latin typeface="Calibri"/>
-              </a:defRPr>
-            </a:lvl6pPr>
-            <a:lvl7pPr marL="2519556" algn="l" defTabSz="839852" rtl="0" eaLnBrk="1" latinLnBrk="0" hangingPunct="1">
-              <a:defRPr sz="1653" kern="1200">
-                <a:solidFill>
-                  <a:sysClr val="windowText" lastClr="000000"/>
-                </a:solidFill>
-                <a:latin typeface="Calibri"/>
-              </a:defRPr>
-            </a:lvl7pPr>
-            <a:lvl8pPr marL="2939482" algn="l" defTabSz="839852" rtl="0" eaLnBrk="1" latinLnBrk="0" hangingPunct="1">
-              <a:defRPr sz="1653" kern="1200">
-                <a:solidFill>
-                  <a:sysClr val="windowText" lastClr="000000"/>
-                </a:solidFill>
-                <a:latin typeface="Calibri"/>
-              </a:defRPr>
-            </a:lvl8pPr>
-            <a:lvl9pPr marL="3359408" algn="l" defTabSz="839852" rtl="0" eaLnBrk="1" latinLnBrk="0" hangingPunct="1">
-              <a:defRPr sz="1653" kern="1200">
-                <a:solidFill>
-                  <a:sysClr val="windowText" lastClr="000000"/>
-                </a:solidFill>
-                <a:latin typeface="Calibri"/>
-              </a:defRPr>
-            </a:lvl9pPr>
-          </a:lstStyle>
-          <a:p>
-            <a:pPr>
-              <a:defRPr/>
-            </a:pPr>
-            <a:r>
-              <a:rPr lang="nl-NL" sz="1000" b="0" kern="1200" noProof="0" dirty="0">
-                <a:solidFill>
-                  <a:schemeClr val="tx1"/>
-                </a:solidFill>
-                <a:latin typeface="Century Gothic" panose="020B0502020202020204" pitchFamily="34" charset="0"/>
-                <a:ea typeface="+mn-ea"/>
-                <a:cs typeface="Arial" panose="020B0604020202020204" pitchFamily="34" charset="0"/>
-              </a:rPr>
-              <a:t>Steun en betrokkenheid van ouders hebben een beschermende werking op middelengebruik en mentale gezondheid van jongeren. Dat geldt ook voor ouders die veel tijd doorbrengen met hun kind, weten waar hun kind is en duidelijke regels hebben over wat hun kind wel en niet mag doen.</a:t>
-            </a:r>
-          </a:p>
-        </p:txBody>
-      </p:sp>
-      <p:sp>
-        <p:nvSpPr>
-          <p:cNvPr id="19" name="Grafiek mentaal tijd">
-            <a:extLst>
-              <a:ext uri="{FF2B5EF4-FFF2-40B4-BE49-F238E27FC236}">
-                <a16:creationId xmlns:a16="http://schemas.microsoft.com/office/drawing/2014/main" id="{32F134F1-45F3-A56E-9038-F92D47EA0A46}"/>
-              </a:ext>
-            </a:extLst>
-          </p:cNvPr>
-          <p:cNvSpPr>
-            <a:spLocks noGrp="1"/>
-          </p:cNvSpPr>
-          <p:nvPr>
-            <p:ph type="chart" sz="quarter" idx="17"/>
-          </p:nvPr>
-        </p:nvSpPr>
-        <p:spPr>
-          <a:xfrm>
-            <a:off x="8278781" y="4024800"/>
-            <a:ext cx="3456000" cy="2340000"/>
-          </a:xfrm>
-          <a:prstGeom prst="rect">
-            <a:avLst/>
-          </a:prstGeom>
-        </p:spPr>
-        <p:txBody>
-          <a:bodyPr/>
-          <a:lstStyle>
-            <a:lvl1pPr marL="0" indent="0">
-              <a:buNone/>
-              <a:defRPr sz="3200"/>
-            </a:lvl1pPr>
-          </a:lstStyle>
-          <a:p>
-            <a:endParaRPr lang="nl-NL"/>
-          </a:p>
-        </p:txBody>
-      </p:sp>
-      <p:sp>
-        <p:nvSpPr>
-          <p:cNvPr id="22" name="Grafiek ouders regels">
-            <a:extLst>
-              <a:ext uri="{FF2B5EF4-FFF2-40B4-BE49-F238E27FC236}">
-                <a16:creationId xmlns:a16="http://schemas.microsoft.com/office/drawing/2014/main" id="{8927A105-2FB9-7D11-40DE-61B54C218EB8}"/>
-              </a:ext>
-            </a:extLst>
-          </p:cNvPr>
-          <p:cNvSpPr>
-            <a:spLocks noGrp="1"/>
-          </p:cNvSpPr>
-          <p:nvPr>
-            <p:ph type="chart" sz="quarter" idx="16"/>
-          </p:nvPr>
-        </p:nvSpPr>
-        <p:spPr>
-          <a:xfrm>
-            <a:off x="8278781" y="1519200"/>
-            <a:ext cx="3456000" cy="2340000"/>
-          </a:xfrm>
-          <a:prstGeom prst="rect">
-            <a:avLst/>
-          </a:prstGeom>
-        </p:spPr>
-        <p:txBody>
-          <a:bodyPr/>
-          <a:lstStyle>
-            <a:lvl1pPr marL="0" indent="0">
-              <a:buNone/>
-              <a:defRPr sz="3200"/>
-            </a:lvl1pPr>
-          </a:lstStyle>
-          <a:p>
-            <a:endParaRPr lang="nl-NL"/>
-          </a:p>
-        </p:txBody>
-      </p:sp>
-      <p:sp>
-        <p:nvSpPr>
-          <p:cNvPr id="23" name="Grafiek ouders tijd">
-            <a:extLst>
-              <a:ext uri="{FF2B5EF4-FFF2-40B4-BE49-F238E27FC236}">
-                <a16:creationId xmlns:a16="http://schemas.microsoft.com/office/drawing/2014/main" id="{E4AB63F7-4C6C-2EBF-E8D7-FBB386352204}"/>
-              </a:ext>
-            </a:extLst>
-          </p:cNvPr>
-          <p:cNvSpPr>
-            <a:spLocks noGrp="1"/>
-          </p:cNvSpPr>
-          <p:nvPr>
-            <p:ph type="chart" sz="quarter" idx="19"/>
-          </p:nvPr>
-        </p:nvSpPr>
-        <p:spPr>
-          <a:xfrm>
-            <a:off x="4370400" y="4024800"/>
-            <a:ext cx="3456000" cy="2340000"/>
-          </a:xfrm>
-          <a:prstGeom prst="rect">
-            <a:avLst/>
-          </a:prstGeom>
-        </p:spPr>
-        <p:txBody>
-          <a:bodyPr/>
-          <a:lstStyle>
-            <a:lvl1pPr marL="0" indent="0">
-              <a:buNone/>
-              <a:defRPr sz="3200"/>
-            </a:lvl1pPr>
-          </a:lstStyle>
-          <a:p>
-            <a:endParaRPr lang="nl-NL" dirty="0"/>
-          </a:p>
-        </p:txBody>
-      </p:sp>
-      <p:sp>
-        <p:nvSpPr>
-          <p:cNvPr id="24" name="Grafiek ouders weten">
-            <a:extLst>
-              <a:ext uri="{FF2B5EF4-FFF2-40B4-BE49-F238E27FC236}">
-                <a16:creationId xmlns:a16="http://schemas.microsoft.com/office/drawing/2014/main" id="{6E66AB55-227B-CE36-7E38-E5FA74E13257}"/>
-              </a:ext>
-            </a:extLst>
-          </p:cNvPr>
-          <p:cNvSpPr>
-            <a:spLocks noGrp="1"/>
-          </p:cNvSpPr>
-          <p:nvPr>
-            <p:ph type="chart" sz="quarter" idx="20"/>
-          </p:nvPr>
-        </p:nvSpPr>
-        <p:spPr>
-          <a:xfrm>
-            <a:off x="4370400" y="1519200"/>
-            <a:ext cx="3456000" cy="2340000"/>
-          </a:xfrm>
-          <a:prstGeom prst="rect">
-            <a:avLst/>
-          </a:prstGeom>
-        </p:spPr>
-        <p:txBody>
-          <a:bodyPr/>
-          <a:lstStyle>
-            <a:lvl1pPr marL="0" indent="0">
-              <a:buNone/>
-              <a:defRPr sz="3200"/>
-            </a:lvl1pPr>
-          </a:lstStyle>
-          <a:p>
-            <a:endParaRPr lang="nl-NL" dirty="0"/>
-          </a:p>
-        </p:txBody>
-      </p:sp>
-      <p:sp>
-        <p:nvSpPr>
-          <p:cNvPr id="25" name="Grafiek terecht probleem">
-            <a:extLst>
-              <a:ext uri="{FF2B5EF4-FFF2-40B4-BE49-F238E27FC236}">
-                <a16:creationId xmlns:a16="http://schemas.microsoft.com/office/drawing/2014/main" id="{08F1B6D0-F56B-103E-CE9E-94734C47EF77}"/>
-              </a:ext>
-            </a:extLst>
-          </p:cNvPr>
-          <p:cNvSpPr>
-            <a:spLocks noGrp="1"/>
-          </p:cNvSpPr>
-          <p:nvPr>
-            <p:ph type="chart" sz="quarter" idx="21"/>
-          </p:nvPr>
-        </p:nvSpPr>
-        <p:spPr>
-          <a:xfrm>
-            <a:off x="463887" y="4024800"/>
-            <a:ext cx="3456000" cy="2340000"/>
-          </a:xfrm>
-          <a:prstGeom prst="rect">
-            <a:avLst/>
-          </a:prstGeom>
-        </p:spPr>
-        <p:txBody>
-          <a:bodyPr/>
-          <a:lstStyle>
-            <a:lvl1pPr marL="0" indent="0">
-              <a:buNone/>
-              <a:defRPr sz="3200"/>
-            </a:lvl1pPr>
-          </a:lstStyle>
-          <a:p>
-            <a:endParaRPr lang="nl-NL" dirty="0"/>
-          </a:p>
-        </p:txBody>
-      </p:sp>
-      <p:sp>
-        <p:nvSpPr>
-          <p:cNvPr id="5" name="Percentage terecht">
-            <a:extLst>
-              <a:ext uri="{FF2B5EF4-FFF2-40B4-BE49-F238E27FC236}">
-                <a16:creationId xmlns:a16="http://schemas.microsoft.com/office/drawing/2014/main" id="{1B2381A6-D792-7218-964A-4EEB1B9CC22D}"/>
-              </a:ext>
-            </a:extLst>
-          </p:cNvPr>
-          <p:cNvSpPr>
-            <a:spLocks noGrp="1"/>
-          </p:cNvSpPr>
-          <p:nvPr>
-            <p:ph type="body" sz="quarter" idx="13" hasCustomPrompt="1"/>
-          </p:nvPr>
-        </p:nvSpPr>
-        <p:spPr>
-          <a:xfrm>
-            <a:off x="942521" y="3035890"/>
-            <a:ext cx="838200" cy="838200"/>
-          </a:xfrm>
-          <a:prstGeom prst="ellipse">
-            <a:avLst/>
-          </a:prstGeom>
-          <a:solidFill>
-            <a:schemeClr val="accent5"/>
-          </a:solidFill>
-          <a:ln>
-            <a:noFill/>
-          </a:ln>
-        </p:spPr>
-        <p:txBody>
-          <a:bodyPr anchor="ctr"/>
-          <a:lstStyle>
-            <a:lvl1pPr marL="0" indent="0" algn="ctr">
-              <a:buNone/>
-              <a:defRPr sz="1600" b="1">
-                <a:solidFill>
-                  <a:schemeClr val="bg1"/>
-                </a:solidFill>
-                <a:latin typeface="Century Gothic" panose="020B0502020202020204" pitchFamily="34" charset="0"/>
-              </a:defRPr>
-            </a:lvl1pPr>
-            <a:lvl2pPr marL="502159" indent="0">
-              <a:buNone/>
-              <a:defRPr/>
-            </a:lvl2pPr>
-            <a:lvl3pPr marL="1004316" indent="0">
-              <a:buNone/>
-              <a:defRPr/>
-            </a:lvl3pPr>
-            <a:lvl4pPr marL="1506476" indent="0">
-              <a:buNone/>
-              <a:defRPr/>
-            </a:lvl4pPr>
-            <a:lvl5pPr marL="2008632" indent="0">
-              <a:buNone/>
-              <a:defRPr/>
-            </a:lvl5pPr>
-          </a:lstStyle>
-          <a:p>
-            <a:pPr lvl="0"/>
-            <a:r>
-              <a:rPr lang="nl-NL" dirty="0"/>
-              <a:t>xx%</a:t>
-            </a:r>
-          </a:p>
-        </p:txBody>
-      </p:sp>
-    </p:spTree>
-    <p:extLst>
-      <p:ext uri="{BB962C8B-B14F-4D97-AF65-F5344CB8AC3E}">
-        <p14:creationId xmlns:p14="http://schemas.microsoft.com/office/powerpoint/2010/main" val="2634502353"/>
-      </p:ext>
-    </p:extLst>
-  </p:cSld>
-  <p:clrMapOvr>
-    <a:masterClrMapping/>
-  </p:clrMapOvr>
-  <p:extLst>
-    <p:ext uri="{DCECCB84-F9BA-43D5-87BE-67443E8EF086}">
-      <p15:sldGuideLst xmlns:p15="http://schemas.microsoft.com/office/powerpoint/2012/main">
-        <p15:guide id="1" orient="horz" pos="2160" userDrawn="1">
-          <p15:clr>
-            <a:srgbClr val="FBAE40"/>
-          </p15:clr>
-        </p15:guide>
-        <p15:guide id="2" pos="3840" userDrawn="1">
-          <p15:clr>
-            <a:srgbClr val="FBAE40"/>
-          </p15:clr>
-        </p15:guide>
-      </p15:sldGuideLst>
-    </p:ext>
-  </p:extLst>
-</p:sldLayout>
-</file>
-
-<file path=ppt/slideLayouts/slideLayout12.xml><?xml version="1.0" encoding="utf-8"?>
-<p:sldLayout xmlns:a="http://schemas.openxmlformats.org/drawingml/2006/main" xmlns:r="http://schemas.openxmlformats.org/officeDocument/2006/relationships" xmlns:p="http://schemas.openxmlformats.org/presentationml/2006/main" preserve="1" userDrawn="1">
   <p:cSld name="School">
     <p:spTree>
       <p:nvGrpSpPr>
@@ -4023,7 +3003,7 @@
 </p:sldLayout>
 </file>
 
-<file path=ppt/slideLayouts/slideLayout13.xml><?xml version="1.0" encoding="utf-8"?>
+<file path=ppt/slideLayouts/slideLayout12.xml><?xml version="1.0" encoding="utf-8"?>
 <p:sldLayout xmlns:a="http://schemas.openxmlformats.org/drawingml/2006/main" xmlns:r="http://schemas.openxmlformats.org/officeDocument/2006/relationships" xmlns:p="http://schemas.openxmlformats.org/presentationml/2006/main" preserve="1" userDrawn="1">
   <p:cSld name="Leeftijdsgenoten">
     <p:spTree>
@@ -5019,7 +3999,7 @@
 </p:sldLayout>
 </file>
 
-<file path=ppt/slideLayouts/slideLayout14.xml><?xml version="1.0" encoding="utf-8"?>
+<file path=ppt/slideLayouts/slideLayout13.xml><?xml version="1.0" encoding="utf-8"?>
 <p:sldLayout xmlns:a="http://schemas.openxmlformats.org/drawingml/2006/main" xmlns:r="http://schemas.openxmlformats.org/officeDocument/2006/relationships" xmlns:p="http://schemas.openxmlformats.org/presentationml/2006/main" preserve="1" userDrawn="1">
   <p:cSld name="Leeftijdsgenoten 2">
     <p:spTree>
@@ -5822,7 +4802,7 @@
 </p:sldLayout>
 </file>
 
-<file path=ppt/slideLayouts/slideLayout15.xml><?xml version="1.0" encoding="utf-8"?>
+<file path=ppt/slideLayouts/slideLayout14.xml><?xml version="1.0" encoding="utf-8"?>
 <p:sldLayout xmlns:a="http://schemas.openxmlformats.org/drawingml/2006/main" xmlns:r="http://schemas.openxmlformats.org/officeDocument/2006/relationships" xmlns:p="http://schemas.openxmlformats.org/presentationml/2006/main" preserve="1" userDrawn="1">
   <p:cSld name="Leeftijdsgenoten 3">
     <p:spTree>
@@ -6575,7 +5555,7 @@
 </p:sldLayout>
 </file>
 
-<file path=ppt/slideLayouts/slideLayout16.xml><?xml version="1.0" encoding="utf-8"?>
+<file path=ppt/slideLayouts/slideLayout15.xml><?xml version="1.0" encoding="utf-8"?>
 <p:sldLayout xmlns:a="http://schemas.openxmlformats.org/drawingml/2006/main" xmlns:r="http://schemas.openxmlformats.org/officeDocument/2006/relationships" xmlns:p="http://schemas.openxmlformats.org/presentationml/2006/main" preserve="1" userDrawn="1">
   <p:cSld name="Leeftijdsgenoten 4">
     <p:spTree>
@@ -7183,7 +6163,7 @@
 </p:sldLayout>
 </file>
 
-<file path=ppt/slideLayouts/slideLayout17.xml><?xml version="1.0" encoding="utf-8"?>
+<file path=ppt/slideLayouts/slideLayout16.xml><?xml version="1.0" encoding="utf-8"?>
 <p:sldLayout xmlns:a="http://schemas.openxmlformats.org/drawingml/2006/main" xmlns:r="http://schemas.openxmlformats.org/officeDocument/2006/relationships" xmlns:p="http://schemas.openxmlformats.org/presentationml/2006/main" preserve="1" userDrawn="1">
   <p:cSld name="Vrije tijd">
     <p:spTree>
@@ -8286,7 +7266,7 @@
 </p:sldLayout>
 </file>
 
-<file path=ppt/slideLayouts/slideLayout18.xml><?xml version="1.0" encoding="utf-8"?>
+<file path=ppt/slideLayouts/slideLayout17.xml><?xml version="1.0" encoding="utf-8"?>
 <p:sldLayout xmlns:a="http://schemas.openxmlformats.org/drawingml/2006/main" xmlns:r="http://schemas.openxmlformats.org/officeDocument/2006/relationships" xmlns:p="http://schemas.openxmlformats.org/presentationml/2006/main" preserve="1" userDrawn="1">
   <p:cSld name="Vrije tijd 2">
     <p:spTree>
@@ -9062,7 +8042,7 @@
 </p:sldLayout>
 </file>
 
-<file path=ppt/slideLayouts/slideLayout19.xml><?xml version="1.0" encoding="utf-8"?>
+<file path=ppt/slideLayouts/slideLayout18.xml><?xml version="1.0" encoding="utf-8"?>
 <p:sldLayout xmlns:a="http://schemas.openxmlformats.org/drawingml/2006/main" xmlns:r="http://schemas.openxmlformats.org/officeDocument/2006/relationships" xmlns:p="http://schemas.openxmlformats.org/presentationml/2006/main" preserve="1" userDrawn="1">
   <p:cSld name="1_Vrije tijd 2">
     <p:spTree>
@@ -16030,7 +15010,7 @@
         <p:sp>
           <p:nvSpPr>
             <p:cNvPr id="30" name="Rectangle 23">
-              <a:hlinkClick r:id="rId20" action="ppaction://hlinksldjump"/>
+              <a:hlinkClick r:id="rId19" action="ppaction://hlinksldjump"/>
               <a:extLst>
                 <a:ext uri="{FF2B5EF4-FFF2-40B4-BE49-F238E27FC236}">
                   <a16:creationId xmlns:a16="http://schemas.microsoft.com/office/drawing/2014/main" id="{CB127B58-0E04-70A9-47ED-461794FE8617}"/>
@@ -16083,7 +15063,7 @@
         <p:pic>
           <p:nvPicPr>
             <p:cNvPr id="31" name="Graphic 30" descr="Pictogram hamburgermenu met effen opvulling">
-              <a:hlinkClick r:id="rId20" action="ppaction://hlinksldjump"/>
+              <a:hlinkClick r:id="rId19" action="ppaction://hlinksldjump"/>
               <a:extLst>
                 <a:ext uri="{FF2B5EF4-FFF2-40B4-BE49-F238E27FC236}">
                   <a16:creationId xmlns:a16="http://schemas.microsoft.com/office/drawing/2014/main" id="{99DE48E4-4AEA-BCAC-EEA9-967EF7C21301}"/>
@@ -16096,13 +15076,13 @@
             <p:nvPr userDrawn="1"/>
           </p:nvPicPr>
           <p:blipFill>
-            <a:blip r:embed="rId21" cstate="print">
+            <a:blip r:embed="rId20" cstate="print">
               <a:extLst>
                 <a:ext uri="{28A0092B-C50C-407E-A947-70E740481C1C}">
                   <a14:useLocalDpi xmlns:a14="http://schemas.microsoft.com/office/drawing/2010/main" val="0"/>
                 </a:ext>
                 <a:ext uri="{96DAC541-7B7A-43D3-8B79-37D633B846F1}">
-                  <asvg:svgBlip xmlns:asvg="http://schemas.microsoft.com/office/drawing/2016/SVG/main" r:embed="rId22"/>
+                  <asvg:svgBlip xmlns:asvg="http://schemas.microsoft.com/office/drawing/2016/SVG/main" r:embed="rId21"/>
                 </a:ext>
               </a:extLst>
             </a:blip>
@@ -16136,7 +15116,7 @@
           <p:nvPr userDrawn="1"/>
         </p:nvPicPr>
         <p:blipFill>
-          <a:blip r:embed="rId23">
+          <a:blip r:embed="rId22">
             <a:extLst>
               <a:ext uri="{28A0092B-C50C-407E-A947-70E740481C1C}">
                 <a14:useLocalDpi xmlns:a14="http://schemas.microsoft.com/office/drawing/2010/main" val="0"/>
@@ -16176,15 +15156,14 @@
     <p:sldLayoutId id="2147483663" r:id="rId7"/>
     <p:sldLayoutId id="2147483664" r:id="rId8"/>
     <p:sldLayoutId id="2147483682" r:id="rId9"/>
-    <p:sldLayoutId id="2147483706" r:id="rId10"/>
-    <p:sldLayoutId id="2147483679" r:id="rId11"/>
-    <p:sldLayoutId id="2147483680" r:id="rId12"/>
-    <p:sldLayoutId id="2147483701" r:id="rId13"/>
-    <p:sldLayoutId id="2147483703" r:id="rId14"/>
-    <p:sldLayoutId id="2147483704" r:id="rId15"/>
-    <p:sldLayoutId id="2147483676" r:id="rId16"/>
-    <p:sldLayoutId id="2147483700" r:id="rId17"/>
-    <p:sldLayoutId id="2147483707" r:id="rId18"/>
+    <p:sldLayoutId id="2147483679" r:id="rId10"/>
+    <p:sldLayoutId id="2147483680" r:id="rId11"/>
+    <p:sldLayoutId id="2147483701" r:id="rId12"/>
+    <p:sldLayoutId id="2147483703" r:id="rId13"/>
+    <p:sldLayoutId id="2147483704" r:id="rId14"/>
+    <p:sldLayoutId id="2147483676" r:id="rId15"/>
+    <p:sldLayoutId id="2147483700" r:id="rId16"/>
+    <p:sldLayoutId id="2147483707" r:id="rId17"/>
   </p:sldLayoutIdLst>
   <p:txStyles>
     <p:titleStyle>
@@ -16535,7 +15514,7 @@
     </p:spTree>
     <p:extLst>
       <p:ext uri="{BB962C8B-B14F-4D97-AF65-F5344CB8AC3E}">
-        <p14:creationId xmlns:p14="http://schemas.microsoft.com/office/powerpoint/2010/main" val="1709752066"/>
+        <p14:creationId xmlns:p14="http://schemas.microsoft.com/office/powerpoint/2010/main" val="325107848"/>
       </p:ext>
     </p:extLst>
   </p:cSld>
@@ -16565,7 +15544,7 @@
     </p:spTree>
     <p:extLst>
       <p:ext uri="{BB962C8B-B14F-4D97-AF65-F5344CB8AC3E}">
-        <p14:creationId xmlns:p14="http://schemas.microsoft.com/office/powerpoint/2010/main" val="325107848"/>
+        <p14:creationId xmlns:p14="http://schemas.microsoft.com/office/powerpoint/2010/main" val="1584460984"/>
       </p:ext>
     </p:extLst>
   </p:cSld>
@@ -16576,36 +15555,6 @@
 </file>
 
 <file path=ppt/slides/slide13.xml><?xml version="1.0" encoding="utf-8"?>
-<p:sld xmlns:a="http://schemas.openxmlformats.org/drawingml/2006/main" xmlns:r="http://schemas.openxmlformats.org/officeDocument/2006/relationships" xmlns:p="http://schemas.openxmlformats.org/presentationml/2006/main">
-  <p:cSld>
-    <p:spTree>
-      <p:nvGrpSpPr>
-        <p:cNvPr id="1" name=""/>
-        <p:cNvGrpSpPr/>
-        <p:nvPr/>
-      </p:nvGrpSpPr>
-      <p:grpSpPr>
-        <a:xfrm>
-          <a:off x="0" y="0"/>
-          <a:ext cx="0" cy="0"/>
-          <a:chOff x="0" y="0"/>
-          <a:chExt cx="0" cy="0"/>
-        </a:xfrm>
-      </p:grpSpPr>
-    </p:spTree>
-    <p:extLst>
-      <p:ext uri="{BB962C8B-B14F-4D97-AF65-F5344CB8AC3E}">
-        <p14:creationId xmlns:p14="http://schemas.microsoft.com/office/powerpoint/2010/main" val="1584460984"/>
-      </p:ext>
-    </p:extLst>
-  </p:cSld>
-  <p:clrMapOvr>
-    <a:masterClrMapping/>
-  </p:clrMapOvr>
-</p:sld>
-</file>
-
-<file path=ppt/slides/slide14.xml><?xml version="1.0" encoding="utf-8"?>
 <p:sld xmlns:a="http://schemas.openxmlformats.org/drawingml/2006/main" xmlns:r="http://schemas.openxmlformats.org/officeDocument/2006/relationships" xmlns:p="http://schemas.openxmlformats.org/presentationml/2006/main">
   <p:cSld>
     <p:spTree>
@@ -16641,7 +15590,7 @@
 </p:sld>
 </file>
 
-<file path=ppt/slides/slide15.xml><?xml version="1.0" encoding="utf-8"?>
+<file path=ppt/slides/slide14.xml><?xml version="1.0" encoding="utf-8"?>
 <p:sld xmlns:a="http://schemas.openxmlformats.org/drawingml/2006/main" xmlns:r="http://schemas.openxmlformats.org/officeDocument/2006/relationships" xmlns:p="http://schemas.openxmlformats.org/presentationml/2006/main">
   <p:cSld>
     <p:spTree>
@@ -16677,7 +15626,7 @@
 </p:sld>
 </file>
 
-<file path=ppt/slides/slide16.xml><?xml version="1.0" encoding="utf-8"?>
+<file path=ppt/slides/slide15.xml><?xml version="1.0" encoding="utf-8"?>
 <p:sld xmlns:a="http://schemas.openxmlformats.org/drawingml/2006/main" xmlns:r="http://schemas.openxmlformats.org/officeDocument/2006/relationships" xmlns:p="http://schemas.openxmlformats.org/presentationml/2006/main">
   <p:cSld>
     <p:spTree>
@@ -16713,7 +15662,7 @@
 </p:sld>
 </file>
 
-<file path=ppt/slides/slide17.xml><?xml version="1.0" encoding="utf-8"?>
+<file path=ppt/slides/slide16.xml><?xml version="1.0" encoding="utf-8"?>
 <p:sld xmlns:a="http://schemas.openxmlformats.org/drawingml/2006/main" xmlns:r="http://schemas.openxmlformats.org/officeDocument/2006/relationships" xmlns:p="http://schemas.openxmlformats.org/presentationml/2006/main">
   <p:cSld>
     <p:spTree>
@@ -16749,7 +15698,7 @@
 </p:sld>
 </file>
 
-<file path=ppt/slides/slide18.xml><?xml version="1.0" encoding="utf-8"?>
+<file path=ppt/slides/slide17.xml><?xml version="1.0" encoding="utf-8"?>
 <p:sld xmlns:a="http://schemas.openxmlformats.org/drawingml/2006/main" xmlns:r="http://schemas.openxmlformats.org/officeDocument/2006/relationships" xmlns:p="http://schemas.openxmlformats.org/presentationml/2006/main">
   <p:cSld>
     <p:spTree>
@@ -16785,7 +15734,7 @@
 </p:sld>
 </file>
 
-<file path=ppt/slides/slide19.xml><?xml version="1.0" encoding="utf-8"?>
+<file path=ppt/slides/slide18.xml><?xml version="1.0" encoding="utf-8"?>
 <p:sld xmlns:a="http://schemas.openxmlformats.org/drawingml/2006/main" xmlns:r="http://schemas.openxmlformats.org/officeDocument/2006/relationships" xmlns:p="http://schemas.openxmlformats.org/presentationml/2006/main">
   <p:cSld>
     <p:spTree>
@@ -19117,7 +18066,7 @@
 </file>
 
 <file path=customXml/item1.xml><?xml version="1.0" encoding="utf-8"?>
-<ct:contentTypeSchema xmlns:ct="http://schemas.microsoft.com/office/2006/metadata/contentType" xmlns:ma="http://schemas.microsoft.com/office/2006/metadata/properties/metaAttributes" ct:_="" ma:_="" ma:contentTypeName="Document" ma:contentTypeID="0x010100C4EA295FB1FB9547A73C9F5819D6E613" ma:contentTypeVersion="22" ma:contentTypeDescription="Een nieuw document maken." ma:contentTypeScope="" ma:versionID="586e6f9b10cb27d3f03483507ae7cb9d">
+<ct:contentTypeSchema xmlns:ct="http://schemas.microsoft.com/office/2006/metadata/contentType" xmlns:ma="http://schemas.microsoft.com/office/2006/metadata/properties/metaAttributes" ct:_="" ma:_="" ma:contentTypeName="Document" ma:contentTypeID="0x010100C4EA295FB1FB9547A73C9F5819D6E613" ma:contentTypeVersion="23" ma:contentTypeDescription="Een nieuw document maken." ma:contentTypeScope="" ma:versionID="fb09b8f9996d29818860aca561f17aea">
   <xsd:schema xmlns:xsd="http://www.w3.org/2001/XMLSchema" xmlns:xs="http://www.w3.org/2001/XMLSchema" xmlns:p="http://schemas.microsoft.com/office/2006/metadata/properties" xmlns:ns1="http://schemas.microsoft.com/sharepoint/v3" xmlns:ns2="4e95bed8-6d15-4403-ad70-a53422338dca" xmlns:ns3="10d3344f-2d16-43d9-a145-97142f5cb288" xmlns:ns4="d045ab76-3bb7-45f5-ab41-d7b04aa0dc94" targetNamespace="http://schemas.microsoft.com/office/2006/metadata/properties" ma:root="true" ma:fieldsID="f29125cba2118f3064d103e6e0ba85ce" ns1:_="" ns2:_="" ns3:_="" ns4:_="">
     <xsd:import namespace="http://schemas.microsoft.com/sharepoint/v3"/>
     <xsd:import namespace="4e95bed8-6d15-4403-ad70-a53422338dca"/>
@@ -19402,15 +18351,6 @@
 </file>
 
 <file path=customXml/item2.xml><?xml version="1.0" encoding="utf-8"?>
-<?mso-contentType ?>
-<FormTemplates xmlns="http://schemas.microsoft.com/sharepoint/v3/contenttype/forms">
-  <Display>DocumentLibraryForm</Display>
-  <Edit>DocumentLibraryForm</Edit>
-  <New>DocumentLibraryForm</New>
-</FormTemplates>
-</file>
-
-<file path=customXml/item3.xml><?xml version="1.0" encoding="utf-8"?>
 <p:properties xmlns:p="http://schemas.microsoft.com/office/2006/metadata/properties" xmlns:xsi="http://www.w3.org/2001/XMLSchema-instance" xmlns:pc="http://schemas.microsoft.com/office/infopath/2007/PartnerControls">
   <documentManagement>
     <_ip_UnifiedCompliancePolicyUIAction xmlns="http://schemas.microsoft.com/sharepoint/v3" xsi:nil="true"/>
@@ -19426,8 +18366,17 @@
 </p:properties>
 </file>
 
+<file path=customXml/item3.xml><?xml version="1.0" encoding="utf-8"?>
+<?mso-contentType ?>
+<FormTemplates xmlns="http://schemas.microsoft.com/sharepoint/v3/contenttype/forms">
+  <Display>DocumentLibraryForm</Display>
+  <Edit>DocumentLibraryForm</Edit>
+  <New>DocumentLibraryForm</New>
+</FormTemplates>
+</file>
+
 <file path=customXml/itemProps1.xml><?xml version="1.0" encoding="utf-8"?>
-<ds:datastoreItem xmlns:ds="http://schemas.openxmlformats.org/officeDocument/2006/customXml" ds:itemID="{3877EA04-D8B7-4991-BFA8-6EA9B8CD23EF}">
+<ds:datastoreItem xmlns:ds="http://schemas.openxmlformats.org/officeDocument/2006/customXml" ds:itemID="{C80196C7-9E34-4097-AAF0-FBA9D817999D}">
   <ds:schemaRefs>
     <ds:schemaRef ds:uri="http://schemas.microsoft.com/office/2006/metadata/contentType"/>
     <ds:schemaRef ds:uri="http://schemas.microsoft.com/office/2006/metadata/properties/metaAttributes"/>
@@ -19448,14 +18397,6 @@
 </file>
 
 <file path=customXml/itemProps2.xml><?xml version="1.0" encoding="utf-8"?>
-<ds:datastoreItem xmlns:ds="http://schemas.openxmlformats.org/officeDocument/2006/customXml" ds:itemID="{D4797234-1F06-4080-A1F9-30DCE4CF2F06}">
-  <ds:schemaRefs>
-    <ds:schemaRef ds:uri="http://schemas.microsoft.com/sharepoint/v3/contenttype/forms"/>
-  </ds:schemaRefs>
-</ds:datastoreItem>
-</file>
-
-<file path=customXml/itemProps3.xml><?xml version="1.0" encoding="utf-8"?>
 <ds:datastoreItem xmlns:ds="http://schemas.openxmlformats.org/officeDocument/2006/customXml" ds:itemID="{428373FD-713A-4C43-B3FE-80F0E3D63506}">
   <ds:schemaRefs>
     <ds:schemaRef ds:uri="http://schemas.microsoft.com/office/2006/documentManagement/types"/>
@@ -19472,4 +18413,12 @@
     <ds:schemaRef ds:uri="d045ab76-3bb7-45f5-ab41-d7b04aa0dc94"/>
   </ds:schemaRefs>
 </ds:datastoreItem>
+</file>
+
+<file path=customXml/itemProps3.xml><?xml version="1.0" encoding="utf-8"?>
+<ds:datastoreItem xmlns:ds="http://schemas.openxmlformats.org/officeDocument/2006/customXml" ds:itemID="{D4797234-1F06-4080-A1F9-30DCE4CF2F06}">
+  <ds:schemaRefs>
+    <ds:schemaRef ds:uri="http://schemas.microsoft.com/sharepoint/v3/contenttype/forms"/>
+  </ds:schemaRefs>
+</ds:datastoreItem>
 </file>